--- a/dist/초1/체육·보건·안전/움직임/초1_체육·보건·안전_움직임_01_걷기·달리기·균형놀이_학생용.pptx
+++ b/dist/초1/체육·보건·안전/움직임/초1_체육·보건·안전_움직임_01_걷기·달리기·균형놀이_학생용.pptx
@@ -114,34 +114,34 @@
   <p:extLst>
     <p:ext uri="{521415D9-36F7-43E2-AB2F-B90AF26B5E84}">
       <p14:sectionLst xmlns:p14="http://schemas.microsoft.com/office/powerpoint/2010/main">
-        <p14:section name="도입" id="{df71cc37-68af-fd54-81b3-da9f492ba94d}">
+        <p14:section name="도입" id="{5286e0b9-2345-2c23-a0f6-2d09a955377d}">
           <p14:sldIdLst>
             <p14:sldId id="256"/>
             <p14:sldId id="257"/>
           </p14:sldIdLst>
         </p14:section>
-        <p14:section name="개념" id="{87f43149-f33b-5120-7a57-569bcf18a70d}">
+        <p14:section name="개념" id="{177f44a9-22b8-fc1a-406f-d12a7e554557}">
           <p14:sldIdLst>
             <p14:sldId id="258"/>
           </p14:sldIdLst>
         </p14:section>
-        <p14:section name="연습" id="{98e27227-6548-262f-fa1d-b54e997ca6e2}">
+        <p14:section name="연습" id="{e2d25c90-88f1-d7a9-c416-89c6c2317d37}">
           <p14:sldIdLst>
             <p14:sldId id="259"/>
             <p14:sldId id="260"/>
           </p14:sldIdLst>
         </p14:section>
-        <p14:section name="확인" id="{ca87e129-13a6-b925-c7d9-21ce1b6be772}">
+        <p14:section name="확인" id="{dd4f1b28-9b0c-490c-e6e4-4702b112ab30}">
           <p14:sldIdLst>
             <p14:sldId id="261"/>
           </p14:sldIdLst>
         </p14:section>
-        <p14:section name="정리" id="{f3a2a9b7-8f49-a661-e30f-8df36d79330d}">
+        <p14:section name="정리" id="{77acc9d1-7fe9-c6f7-3007-301dd9202a42}">
           <p14:sldIdLst>
             <p14:sldId id="262"/>
           </p14:sldIdLst>
         </p14:section>
-        <p14:section name="보충" id="{c5535312-a9cf-4e27-f8e8-38a490a636ca}">
+        <p14:section name="보충" id="{4e7706f0-9a74-2b37-8ac6-bfc2e5f1ff49}">
           <p14:sldIdLst>
             <p14:sldId id="263"/>
           </p14:sldIdLst>

--- a/dist/초1/체육·보건·안전/움직임/초1_체육·보건·안전_움직임_01_걷기·달리기·균형놀이_학생용.pptx
+++ b/dist/초1/체육·보건·안전/움직임/초1_체육·보건·안전_움직임_01_걷기·달리기·균형놀이_학생용.pptx
@@ -114,34 +114,34 @@
   <p:extLst>
     <p:ext uri="{521415D9-36F7-43E2-AB2F-B90AF26B5E84}">
       <p14:sectionLst xmlns:p14="http://schemas.microsoft.com/office/powerpoint/2010/main">
-        <p14:section name="도입" id="{5286e0b9-2345-2c23-a0f6-2d09a955377d}">
+        <p14:section name="도입" id="{b7839a38-2fa4-f7b9-076f-c2d4dcf73329}">
           <p14:sldIdLst>
             <p14:sldId id="256"/>
             <p14:sldId id="257"/>
           </p14:sldIdLst>
         </p14:section>
-        <p14:section name="개념" id="{177f44a9-22b8-fc1a-406f-d12a7e554557}">
+        <p14:section name="개념" id="{f439295f-b835-569d-ecd5-c816e255ab2f}">
           <p14:sldIdLst>
             <p14:sldId id="258"/>
           </p14:sldIdLst>
         </p14:section>
-        <p14:section name="연습" id="{e2d25c90-88f1-d7a9-c416-89c6c2317d37}">
+        <p14:section name="연습" id="{475140bd-ffad-217c-ef49-a7c5b44f56b8}">
           <p14:sldIdLst>
             <p14:sldId id="259"/>
             <p14:sldId id="260"/>
           </p14:sldIdLst>
         </p14:section>
-        <p14:section name="확인" id="{dd4f1b28-9b0c-490c-e6e4-4702b112ab30}">
+        <p14:section name="확인" id="{cffe561e-b8f4-886f-6230-8973d68c5dc8}">
           <p14:sldIdLst>
             <p14:sldId id="261"/>
           </p14:sldIdLst>
         </p14:section>
-        <p14:section name="정리" id="{77acc9d1-7fe9-c6f7-3007-301dd9202a42}">
+        <p14:section name="정리" id="{3d6c8de9-8054-a600-a3ad-b30d76f7ffea}">
           <p14:sldIdLst>
             <p14:sldId id="262"/>
           </p14:sldIdLst>
         </p14:section>
-        <p14:section name="보충" id="{4e7706f0-9a74-2b37-8ac6-bfc2e5f1ff49}">
+        <p14:section name="보충" id="{5896e495-3bc4-d111-288b-620867b702d8}">
           <p14:sldIdLst>
             <p14:sldId id="263"/>
           </p14:sldIdLst>
